--- a/templates/static/content/full_image_overlay_ocean_blue.pptx
+++ b/templates/static/content/full_image_overlay_ocean_blue.pptx
@@ -4,6 +4,10 @@
   <p:sldMasterIdLst>
     <p:sldMasterId id="2147483648" r:id="rId1"/>
   </p:sldMasterIdLst>
+  <p:sldIdLst>
+    <p:sldId id="256" r:id="rId7"/>
+    <p:sldId id="257" r:id="rId8"/>
+  </p:sldIdLst>
   <p:sldSz cx="9144000" cy="6858000" type="screen4x3"/>
   <p:notesSz cx="6858000" cy="9144000"/>
   <p:defaultTextStyle>
@@ -3073,6 +3077,1002 @@
     </p:otherStyle>
   </p:txStyles>
 </p:sldMaster>
+</file>
+
+<file path=ppt/slides/slide1.xml><?xml version="1.0" encoding="utf-8"?>
+<p:sld xmlns:a="http://schemas.openxmlformats.org/drawingml/2006/main" xmlns:p="http://schemas.openxmlformats.org/presentationml/2006/main" xmlns:r="http://schemas.openxmlformats.org/officeDocument/2006/relationships">
+  <p:cSld>
+    <p:spTree>
+      <p:nvGrpSpPr>
+        <p:cNvPr id="1" name=""/>
+        <p:cNvGrpSpPr/>
+        <p:nvPr/>
+      </p:nvGrpSpPr>
+      <p:grpSpPr/>
+      <p:sp>
+        <p:nvSpPr>
+          <p:cNvPr id="2" name="Rectangle 1"/>
+          <p:cNvSpPr/>
+          <p:nvPr/>
+        </p:nvSpPr>
+        <p:spPr>
+          <a:xfrm>
+            <a:off x="0" y="0"/>
+            <a:ext cx="9144000" cy="6858000"/>
+          </a:xfrm>
+          <a:prstGeom prst="rect">
+            <a:avLst/>
+          </a:prstGeom>
+          <a:gradFill rotWithShape="1">
+            <a:gsLst>
+              <a:gs pos="0">
+                <a:srgbClr val="1A237E"/>
+              </a:gs>
+              <a:gs pos="100000">
+                <a:srgbClr val="283593"/>
+              </a:gs>
+            </a:gsLst>
+            <a:lin scaled="0"/>
+          </a:gradFill>
+          <a:ln>
+            <a:noFill/>
+          </a:ln>
+        </p:spPr>
+        <p:style>
+          <a:lnRef idx="1">
+            <a:schemeClr val="accent1"/>
+          </a:lnRef>
+          <a:fillRef idx="3">
+            <a:schemeClr val="accent1"/>
+          </a:fillRef>
+          <a:effectRef idx="2">
+            <a:schemeClr val="accent1"/>
+          </a:effectRef>
+          <a:fontRef idx="minor">
+            <a:schemeClr val="lt1"/>
+          </a:fontRef>
+        </p:style>
+        <p:txBody>
+          <a:bodyPr rtlCol="0" anchor="ctr"/>
+          <a:lstStyle/>
+          <a:p>
+            <a:pPr algn="ctr"/>
+          </a:p>
+        </p:txBody>
+      </p:sp>
+      <p:sp>
+        <p:nvSpPr>
+          <p:cNvPr id="3" name="Oval 2"/>
+          <p:cNvSpPr/>
+          <p:nvPr/>
+        </p:nvSpPr>
+        <p:spPr>
+          <a:xfrm>
+            <a:off x="6400800" y="-914400"/>
+            <a:ext cx="3657600" cy="3657600"/>
+          </a:xfrm>
+          <a:prstGeom prst="ellipse">
+            <a:avLst/>
+          </a:prstGeom>
+          <a:solidFill>
+            <a:srgbClr val="2E3792"/>
+          </a:solidFill>
+          <a:ln>
+            <a:noFill/>
+          </a:ln>
+        </p:spPr>
+        <p:style>
+          <a:lnRef idx="1">
+            <a:schemeClr val="accent1"/>
+          </a:lnRef>
+          <a:fillRef idx="3">
+            <a:schemeClr val="accent1"/>
+          </a:fillRef>
+          <a:effectRef idx="2">
+            <a:schemeClr val="accent1"/>
+          </a:effectRef>
+          <a:fontRef idx="minor">
+            <a:schemeClr val="lt1"/>
+          </a:fontRef>
+        </p:style>
+        <p:txBody>
+          <a:bodyPr rtlCol="0" anchor="ctr"/>
+          <a:lstStyle/>
+          <a:p>
+            <a:pPr algn="ctr"/>
+          </a:p>
+        </p:txBody>
+      </p:sp>
+      <p:sp>
+        <p:nvSpPr>
+          <p:cNvPr id="4" name="Oval 3"/>
+          <p:cNvSpPr/>
+          <p:nvPr/>
+        </p:nvSpPr>
+        <p:spPr>
+          <a:xfrm>
+            <a:off x="-914400" y="4572000"/>
+            <a:ext cx="2743200" cy="2743200"/>
+          </a:xfrm>
+          <a:prstGeom prst="ellipse">
+            <a:avLst/>
+          </a:prstGeom>
+          <a:solidFill>
+            <a:srgbClr val="3744A2"/>
+          </a:solidFill>
+          <a:ln>
+            <a:noFill/>
+          </a:ln>
+        </p:spPr>
+        <p:style>
+          <a:lnRef idx="1">
+            <a:schemeClr val="accent1"/>
+          </a:lnRef>
+          <a:fillRef idx="3">
+            <a:schemeClr val="accent1"/>
+          </a:fillRef>
+          <a:effectRef idx="2">
+            <a:schemeClr val="accent1"/>
+          </a:effectRef>
+          <a:fontRef idx="minor">
+            <a:schemeClr val="lt1"/>
+          </a:fontRef>
+        </p:style>
+        <p:txBody>
+          <a:bodyPr rtlCol="0" anchor="ctr"/>
+          <a:lstStyle/>
+          <a:p>
+            <a:pPr algn="ctr"/>
+          </a:p>
+        </p:txBody>
+      </p:sp>
+      <p:sp>
+        <p:nvSpPr>
+          <p:cNvPr id="5" name="Rectangle 4"/>
+          <p:cNvSpPr/>
+          <p:nvPr/>
+        </p:nvSpPr>
+        <p:spPr>
+          <a:xfrm>
+            <a:off x="0" y="0"/>
+            <a:ext cx="9144000" cy="6858000"/>
+          </a:xfrm>
+          <a:prstGeom prst="rect">
+            <a:avLst/>
+          </a:prstGeom>
+          <a:solidFill>
+            <a:srgbClr val="000000">
+              <a:alpha val="44999"/>
+            </a:srgbClr>
+          </a:solidFill>
+          <a:ln>
+            <a:noFill/>
+          </a:ln>
+        </p:spPr>
+        <p:style>
+          <a:lnRef idx="1">
+            <a:schemeClr val="accent1"/>
+          </a:lnRef>
+          <a:fillRef idx="3">
+            <a:schemeClr val="accent1"/>
+          </a:fillRef>
+          <a:effectRef idx="2">
+            <a:schemeClr val="accent1"/>
+          </a:effectRef>
+          <a:fontRef idx="minor">
+            <a:schemeClr val="lt1"/>
+          </a:fontRef>
+        </p:style>
+        <p:txBody>
+          <a:bodyPr rtlCol="0" anchor="ctr"/>
+          <a:lstStyle/>
+          <a:p>
+            <a:pPr algn="ctr"/>
+          </a:p>
+        </p:txBody>
+      </p:sp>
+      <p:sp>
+        <p:nvSpPr>
+          <p:cNvPr id="6" name="TextBox 5"/>
+          <p:cNvSpPr txBox="1"/>
+          <p:nvPr/>
+        </p:nvSpPr>
+        <p:spPr>
+          <a:xfrm>
+            <a:off x="731520" y="731520"/>
+            <a:ext cx="1828800" cy="914400"/>
+          </a:xfrm>
+          <a:prstGeom prst="rect">
+            <a:avLst/>
+          </a:prstGeom>
+          <a:noFill/>
+        </p:spPr>
+        <p:txBody>
+          <a:bodyPr wrap="square">
+            <a:spAutoFit/>
+          </a:bodyPr>
+          <a:lstStyle/>
+          <a:p>
+            <a:pPr algn="l">
+              <a:defRPr sz="6000" b="1">
+                <a:solidFill>
+                  <a:srgbClr val="FFFFFF"/>
+                </a:solidFill>
+              </a:defRPr>
+            </a:pPr>
+            <a:r>
+              <a:t>01</a:t>
+            </a:r>
+          </a:p>
+        </p:txBody>
+      </p:sp>
+      <p:sp>
+        <p:nvSpPr>
+          <p:cNvPr id="7" name="TextBox 6"/>
+          <p:cNvSpPr txBox="1"/>
+          <p:nvPr/>
+        </p:nvSpPr>
+        <p:spPr>
+          <a:xfrm>
+            <a:off x="731520" y="2011680"/>
+            <a:ext cx="7315200" cy="914400"/>
+          </a:xfrm>
+          <a:prstGeom prst="rect">
+            <a:avLst/>
+          </a:prstGeom>
+          <a:noFill/>
+        </p:spPr>
+        <p:txBody>
+          <a:bodyPr wrap="square">
+            <a:spAutoFit/>
+          </a:bodyPr>
+          <a:lstStyle/>
+          <a:p>
+            <a:pPr algn="l">
+              <a:defRPr sz="3600" b="1">
+                <a:solidFill>
+                  <a:srgbClr val="FFFFFF"/>
+                </a:solidFill>
+              </a:defRPr>
+            </a:pPr>
+            <a:r>
+              <a:t>品牌主张</a:t>
+            </a:r>
+          </a:p>
+        </p:txBody>
+      </p:sp>
+      <p:sp>
+        <p:nvSpPr>
+          <p:cNvPr id="8" name="Rectangle 7"/>
+          <p:cNvSpPr/>
+          <p:nvPr/>
+        </p:nvSpPr>
+        <p:spPr>
+          <a:xfrm>
+            <a:off x="731520" y="3017520"/>
+            <a:ext cx="1828800" cy="36576"/>
+          </a:xfrm>
+          <a:prstGeom prst="rect">
+            <a:avLst/>
+          </a:prstGeom>
+          <a:solidFill>
+            <a:srgbClr val="FF6F00"/>
+          </a:solidFill>
+          <a:ln>
+            <a:noFill/>
+          </a:ln>
+        </p:spPr>
+        <p:style>
+          <a:lnRef idx="1">
+            <a:schemeClr val="accent1"/>
+          </a:lnRef>
+          <a:fillRef idx="3">
+            <a:schemeClr val="accent1"/>
+          </a:fillRef>
+          <a:effectRef idx="2">
+            <a:schemeClr val="accent1"/>
+          </a:effectRef>
+          <a:fontRef idx="minor">
+            <a:schemeClr val="lt1"/>
+          </a:fontRef>
+        </p:style>
+        <p:txBody>
+          <a:bodyPr rtlCol="0" anchor="ctr"/>
+          <a:lstStyle/>
+          <a:p>
+            <a:pPr algn="ctr"/>
+          </a:p>
+        </p:txBody>
+      </p:sp>
+      <p:sp>
+        <p:nvSpPr>
+          <p:cNvPr id="9" name="TextBox 8"/>
+          <p:cNvSpPr txBox="1"/>
+          <p:nvPr/>
+        </p:nvSpPr>
+        <p:spPr>
+          <a:xfrm>
+            <a:off x="731520" y="3291840"/>
+            <a:ext cx="7315200" cy="457200"/>
+          </a:xfrm>
+          <a:prstGeom prst="rect">
+            <a:avLst/>
+          </a:prstGeom>
+          <a:noFill/>
+        </p:spPr>
+        <p:txBody>
+          <a:bodyPr wrap="square">
+            <a:spAutoFit/>
+          </a:bodyPr>
+          <a:lstStyle/>
+          <a:p>
+            <a:pPr algn="l">
+              <a:defRPr sz="2000" b="0">
+                <a:solidFill>
+                  <a:srgbClr val="FFFFFF"/>
+                </a:solidFill>
+              </a:defRPr>
+            </a:pPr>
+            <a:r>
+              <a:t>Brand Vision</a:t>
+            </a:r>
+          </a:p>
+        </p:txBody>
+      </p:sp>
+      <p:sp>
+        <p:nvSpPr>
+          <p:cNvPr id="10" name="TextBox 9"/>
+          <p:cNvSpPr txBox="1"/>
+          <p:nvPr/>
+        </p:nvSpPr>
+        <p:spPr>
+          <a:xfrm>
+            <a:off x="731520" y="3931920"/>
+            <a:ext cx="6400800" cy="2286000"/>
+          </a:xfrm>
+          <a:prstGeom prst="rect">
+            <a:avLst/>
+          </a:prstGeom>
+          <a:noFill/>
+        </p:spPr>
+        <p:txBody>
+          <a:bodyPr wrap="square">
+            <a:spAutoFit/>
+          </a:bodyPr>
+          <a:lstStyle/>
+          <a:p>
+            <a:pPr algn="l">
+              <a:defRPr sz="1400" b="0">
+                <a:solidFill>
+                  <a:srgbClr val="DCDCDC"/>
+                </a:solidFill>
+              </a:defRPr>
+            </a:pPr>
+            <a:r>
+              <a:t>让每一次表达都保持一致的质感与专业度。</a:t>
+            </a:r>
+          </a:p>
+        </p:txBody>
+      </p:sp>
+      <p:sp>
+        <p:nvSpPr>
+          <p:cNvPr id="11" name="TextBox 10"/>
+          <p:cNvSpPr txBox="1"/>
+          <p:nvPr/>
+        </p:nvSpPr>
+        <p:spPr>
+          <a:xfrm>
+            <a:off x="457200" y="1828800"/>
+            <a:ext cx="457200" cy="548640"/>
+          </a:xfrm>
+          <a:prstGeom prst="rect">
+            <a:avLst/>
+          </a:prstGeom>
+          <a:noFill/>
+        </p:spPr>
+        <p:txBody>
+          <a:bodyPr wrap="square">
+            <a:spAutoFit/>
+          </a:bodyPr>
+          <a:lstStyle/>
+          <a:p>
+            <a:pPr algn="l">
+              <a:defRPr sz="4800" b="1">
+                <a:solidFill>
+                  <a:srgbClr val="FF6F00"/>
+                </a:solidFill>
+              </a:defRPr>
+            </a:pPr>
+            <a:r>
+              <a:t>"</a:t>
+            </a:r>
+          </a:p>
+        </p:txBody>
+      </p:sp>
+      <p:sp>
+        <p:nvSpPr>
+          <p:cNvPr id="12" name="Rectangle 11"/>
+          <p:cNvSpPr/>
+          <p:nvPr/>
+        </p:nvSpPr>
+        <p:spPr>
+          <a:xfrm>
+            <a:off x="0" y="6217920"/>
+            <a:ext cx="9144000" cy="640080"/>
+          </a:xfrm>
+          <a:prstGeom prst="rect">
+            <a:avLst/>
+          </a:prstGeom>
+          <a:solidFill>
+            <a:srgbClr val="000000">
+              <a:alpha val="70000"/>
+            </a:srgbClr>
+          </a:solidFill>
+          <a:ln>
+            <a:noFill/>
+          </a:ln>
+        </p:spPr>
+        <p:style>
+          <a:lnRef idx="1">
+            <a:schemeClr val="accent1"/>
+          </a:lnRef>
+          <a:fillRef idx="3">
+            <a:schemeClr val="accent1"/>
+          </a:fillRef>
+          <a:effectRef idx="2">
+            <a:schemeClr val="accent1"/>
+          </a:effectRef>
+          <a:fontRef idx="minor">
+            <a:schemeClr val="lt1"/>
+          </a:fontRef>
+        </p:style>
+        <p:txBody>
+          <a:bodyPr rtlCol="0" anchor="ctr"/>
+          <a:lstStyle/>
+          <a:p>
+            <a:pPr algn="ctr"/>
+          </a:p>
+        </p:txBody>
+      </p:sp>
+      <p:sp>
+        <p:nvSpPr>
+          <p:cNvPr id="13" name="TextBox 12"/>
+          <p:cNvSpPr txBox="1"/>
+          <p:nvPr/>
+        </p:nvSpPr>
+        <p:spPr>
+          <a:xfrm>
+            <a:off x="731520" y="6309360"/>
+            <a:ext cx="7315200" cy="365760"/>
+          </a:xfrm>
+          <a:prstGeom prst="rect">
+            <a:avLst/>
+          </a:prstGeom>
+          <a:noFill/>
+        </p:spPr>
+        <p:txBody>
+          <a:bodyPr wrap="square">
+            <a:spAutoFit/>
+          </a:bodyPr>
+          <a:lstStyle/>
+          <a:p>
+            <a:pPr algn="l">
+              <a:defRPr sz="1000" b="0">
+                <a:solidFill>
+                  <a:srgbClr val="C8C8C8"/>
+                </a:solidFill>
+              </a:defRPr>
+            </a:pPr>
+            <a:r>
+              <a:t>CONFIDENTIAL  |  内部资料</a:t>
+            </a:r>
+          </a:p>
+        </p:txBody>
+      </p:sp>
+    </p:spTree>
+  </p:cSld>
+  <p:clrMapOvr>
+    <a:masterClrMapping/>
+  </p:clrMapOvr>
+</p:sld>
+</file>
+
+<file path=ppt/slides/slide2.xml><?xml version="1.0" encoding="utf-8"?>
+<p:sld xmlns:a="http://schemas.openxmlformats.org/drawingml/2006/main" xmlns:p="http://schemas.openxmlformats.org/presentationml/2006/main" xmlns:r="http://schemas.openxmlformats.org/officeDocument/2006/relationships">
+  <p:cSld>
+    <p:spTree>
+      <p:nvGrpSpPr>
+        <p:cNvPr id="1" name=""/>
+        <p:cNvGrpSpPr/>
+        <p:nvPr/>
+      </p:nvGrpSpPr>
+      <p:grpSpPr/>
+      <p:sp>
+        <p:nvSpPr>
+          <p:cNvPr id="2" name="Rectangle 1"/>
+          <p:cNvSpPr/>
+          <p:nvPr/>
+        </p:nvSpPr>
+        <p:spPr>
+          <a:xfrm>
+            <a:off x="0" y="0"/>
+            <a:ext cx="9144000" cy="6858000"/>
+          </a:xfrm>
+          <a:prstGeom prst="rect">
+            <a:avLst/>
+          </a:prstGeom>
+          <a:gradFill rotWithShape="1">
+            <a:gsLst>
+              <a:gs pos="0">
+                <a:srgbClr val="004D40"/>
+              </a:gs>
+              <a:gs pos="100000">
+                <a:srgbClr val="00695C"/>
+              </a:gs>
+            </a:gsLst>
+            <a:lin scaled="0"/>
+          </a:gradFill>
+          <a:ln>
+            <a:noFill/>
+          </a:ln>
+        </p:spPr>
+        <p:style>
+          <a:lnRef idx="1">
+            <a:schemeClr val="accent1"/>
+          </a:lnRef>
+          <a:fillRef idx="3">
+            <a:schemeClr val="accent1"/>
+          </a:fillRef>
+          <a:effectRef idx="2">
+            <a:schemeClr val="accent1"/>
+          </a:effectRef>
+          <a:fontRef idx="minor">
+            <a:schemeClr val="lt1"/>
+          </a:fontRef>
+        </p:style>
+        <p:txBody>
+          <a:bodyPr rtlCol="0" anchor="ctr"/>
+          <a:lstStyle/>
+          <a:p>
+            <a:pPr algn="ctr"/>
+          </a:p>
+        </p:txBody>
+      </p:sp>
+      <p:sp>
+        <p:nvSpPr>
+          <p:cNvPr id="3" name="Oval 2"/>
+          <p:cNvSpPr/>
+          <p:nvPr/>
+        </p:nvSpPr>
+        <p:spPr>
+          <a:xfrm>
+            <a:off x="6400800" y="-914400"/>
+            <a:ext cx="3657600" cy="3657600"/>
+          </a:xfrm>
+          <a:prstGeom prst="ellipse">
+            <a:avLst/>
+          </a:prstGeom>
+          <a:solidFill>
+            <a:srgbClr val="146154"/>
+          </a:solidFill>
+          <a:ln>
+            <a:noFill/>
+          </a:ln>
+        </p:spPr>
+        <p:style>
+          <a:lnRef idx="1">
+            <a:schemeClr val="accent1"/>
+          </a:lnRef>
+          <a:fillRef idx="3">
+            <a:schemeClr val="accent1"/>
+          </a:fillRef>
+          <a:effectRef idx="2">
+            <a:schemeClr val="accent1"/>
+          </a:effectRef>
+          <a:fontRef idx="minor">
+            <a:schemeClr val="lt1"/>
+          </a:fontRef>
+        </p:style>
+        <p:txBody>
+          <a:bodyPr rtlCol="0" anchor="ctr"/>
+          <a:lstStyle/>
+          <a:p>
+            <a:pPr algn="ctr"/>
+          </a:p>
+        </p:txBody>
+      </p:sp>
+      <p:sp>
+        <p:nvSpPr>
+          <p:cNvPr id="4" name="Oval 3"/>
+          <p:cNvSpPr/>
+          <p:nvPr/>
+        </p:nvSpPr>
+        <p:spPr>
+          <a:xfrm>
+            <a:off x="-914400" y="4572000"/>
+            <a:ext cx="2743200" cy="2743200"/>
+          </a:xfrm>
+          <a:prstGeom prst="ellipse">
+            <a:avLst/>
+          </a:prstGeom>
+          <a:solidFill>
+            <a:srgbClr val="0F786B"/>
+          </a:solidFill>
+          <a:ln>
+            <a:noFill/>
+          </a:ln>
+        </p:spPr>
+        <p:style>
+          <a:lnRef idx="1">
+            <a:schemeClr val="accent1"/>
+          </a:lnRef>
+          <a:fillRef idx="3">
+            <a:schemeClr val="accent1"/>
+          </a:fillRef>
+          <a:effectRef idx="2">
+            <a:schemeClr val="accent1"/>
+          </a:effectRef>
+          <a:fontRef idx="minor">
+            <a:schemeClr val="lt1"/>
+          </a:fontRef>
+        </p:style>
+        <p:txBody>
+          <a:bodyPr rtlCol="0" anchor="ctr"/>
+          <a:lstStyle/>
+          <a:p>
+            <a:pPr algn="ctr"/>
+          </a:p>
+        </p:txBody>
+      </p:sp>
+      <p:sp>
+        <p:nvSpPr>
+          <p:cNvPr id="5" name="Rectangle 4"/>
+          <p:cNvSpPr/>
+          <p:nvPr/>
+        </p:nvSpPr>
+        <p:spPr>
+          <a:xfrm>
+            <a:off x="0" y="0"/>
+            <a:ext cx="9144000" cy="6858000"/>
+          </a:xfrm>
+          <a:prstGeom prst="rect">
+            <a:avLst/>
+          </a:prstGeom>
+          <a:solidFill>
+            <a:srgbClr val="000000">
+              <a:alpha val="44999"/>
+            </a:srgbClr>
+          </a:solidFill>
+          <a:ln>
+            <a:noFill/>
+          </a:ln>
+        </p:spPr>
+        <p:style>
+          <a:lnRef idx="1">
+            <a:schemeClr val="accent1"/>
+          </a:lnRef>
+          <a:fillRef idx="3">
+            <a:schemeClr val="accent1"/>
+          </a:fillRef>
+          <a:effectRef idx="2">
+            <a:schemeClr val="accent1"/>
+          </a:effectRef>
+          <a:fontRef idx="minor">
+            <a:schemeClr val="lt1"/>
+          </a:fontRef>
+        </p:style>
+        <p:txBody>
+          <a:bodyPr rtlCol="0" anchor="ctr"/>
+          <a:lstStyle/>
+          <a:p>
+            <a:pPr algn="ctr"/>
+          </a:p>
+        </p:txBody>
+      </p:sp>
+      <p:sp>
+        <p:nvSpPr>
+          <p:cNvPr id="6" name="TextBox 5"/>
+          <p:cNvSpPr txBox="1"/>
+          <p:nvPr/>
+        </p:nvSpPr>
+        <p:spPr>
+          <a:xfrm>
+            <a:off x="731520" y="731520"/>
+            <a:ext cx="1828800" cy="914400"/>
+          </a:xfrm>
+          <a:prstGeom prst="rect">
+            <a:avLst/>
+          </a:prstGeom>
+          <a:noFill/>
+        </p:spPr>
+        <p:txBody>
+          <a:bodyPr wrap="square">
+            <a:spAutoFit/>
+          </a:bodyPr>
+          <a:lstStyle/>
+          <a:p>
+            <a:pPr algn="l">
+              <a:defRPr sz="6000" b="1">
+                <a:solidFill>
+                  <a:srgbClr val="FFFFFF"/>
+                </a:solidFill>
+              </a:defRPr>
+            </a:pPr>
+            <a:r>
+              <a:t>02</a:t>
+            </a:r>
+          </a:p>
+        </p:txBody>
+      </p:sp>
+      <p:sp>
+        <p:nvSpPr>
+          <p:cNvPr id="7" name="TextBox 6"/>
+          <p:cNvSpPr txBox="1"/>
+          <p:nvPr/>
+        </p:nvSpPr>
+        <p:spPr>
+          <a:xfrm>
+            <a:off x="731520" y="2011680"/>
+            <a:ext cx="7315200" cy="914400"/>
+          </a:xfrm>
+          <a:prstGeom prst="rect">
+            <a:avLst/>
+          </a:prstGeom>
+          <a:noFill/>
+        </p:spPr>
+        <p:txBody>
+          <a:bodyPr wrap="square">
+            <a:spAutoFit/>
+          </a:bodyPr>
+          <a:lstStyle/>
+          <a:p>
+            <a:pPr algn="l">
+              <a:defRPr sz="3600" b="1">
+                <a:solidFill>
+                  <a:srgbClr val="FFFFFF"/>
+                </a:solidFill>
+              </a:defRPr>
+            </a:pPr>
+            <a:r>
+              <a:t>产品理念</a:t>
+            </a:r>
+          </a:p>
+        </p:txBody>
+      </p:sp>
+      <p:sp>
+        <p:nvSpPr>
+          <p:cNvPr id="8" name="Rectangle 7"/>
+          <p:cNvSpPr/>
+          <p:nvPr/>
+        </p:nvSpPr>
+        <p:spPr>
+          <a:xfrm>
+            <a:off x="731520" y="3017520"/>
+            <a:ext cx="1828800" cy="36576"/>
+          </a:xfrm>
+          <a:prstGeom prst="rect">
+            <a:avLst/>
+          </a:prstGeom>
+          <a:solidFill>
+            <a:srgbClr val="FF6F00"/>
+          </a:solidFill>
+          <a:ln>
+            <a:noFill/>
+          </a:ln>
+        </p:spPr>
+        <p:style>
+          <a:lnRef idx="1">
+            <a:schemeClr val="accent1"/>
+          </a:lnRef>
+          <a:fillRef idx="3">
+            <a:schemeClr val="accent1"/>
+          </a:fillRef>
+          <a:effectRef idx="2">
+            <a:schemeClr val="accent1"/>
+          </a:effectRef>
+          <a:fontRef idx="minor">
+            <a:schemeClr val="lt1"/>
+          </a:fontRef>
+        </p:style>
+        <p:txBody>
+          <a:bodyPr rtlCol="0" anchor="ctr"/>
+          <a:lstStyle/>
+          <a:p>
+            <a:pPr algn="ctr"/>
+          </a:p>
+        </p:txBody>
+      </p:sp>
+      <p:sp>
+        <p:nvSpPr>
+          <p:cNvPr id="9" name="TextBox 8"/>
+          <p:cNvSpPr txBox="1"/>
+          <p:nvPr/>
+        </p:nvSpPr>
+        <p:spPr>
+          <a:xfrm>
+            <a:off x="731520" y="3291840"/>
+            <a:ext cx="7315200" cy="457200"/>
+          </a:xfrm>
+          <a:prstGeom prst="rect">
+            <a:avLst/>
+          </a:prstGeom>
+          <a:noFill/>
+        </p:spPr>
+        <p:txBody>
+          <a:bodyPr wrap="square">
+            <a:spAutoFit/>
+          </a:bodyPr>
+          <a:lstStyle/>
+          <a:p>
+            <a:pPr algn="l">
+              <a:defRPr sz="2000" b="0">
+                <a:solidFill>
+                  <a:srgbClr val="FFFFFF"/>
+                </a:solidFill>
+              </a:defRPr>
+            </a:pPr>
+            <a:r>
+              <a:t>Product Philosophy</a:t>
+            </a:r>
+          </a:p>
+        </p:txBody>
+      </p:sp>
+      <p:sp>
+        <p:nvSpPr>
+          <p:cNvPr id="10" name="TextBox 9"/>
+          <p:cNvSpPr txBox="1"/>
+          <p:nvPr/>
+        </p:nvSpPr>
+        <p:spPr>
+          <a:xfrm>
+            <a:off x="731520" y="3931920"/>
+            <a:ext cx="6400800" cy="2286000"/>
+          </a:xfrm>
+          <a:prstGeom prst="rect">
+            <a:avLst/>
+          </a:prstGeom>
+          <a:noFill/>
+        </p:spPr>
+        <p:txBody>
+          <a:bodyPr wrap="square">
+            <a:spAutoFit/>
+          </a:bodyPr>
+          <a:lstStyle/>
+          <a:p>
+            <a:pPr algn="l">
+              <a:defRPr sz="1400" b="0">
+                <a:solidFill>
+                  <a:srgbClr val="DCDCDC"/>
+                </a:solidFill>
+              </a:defRPr>
+            </a:pPr>
+            <a:r>
+              <a:t>把重复劳动交给脚本，把创造力留给内容本身。</a:t>
+            </a:r>
+          </a:p>
+        </p:txBody>
+      </p:sp>
+      <p:sp>
+        <p:nvSpPr>
+          <p:cNvPr id="11" name="TextBox 10"/>
+          <p:cNvSpPr txBox="1"/>
+          <p:nvPr/>
+        </p:nvSpPr>
+        <p:spPr>
+          <a:xfrm>
+            <a:off x="457200" y="1828800"/>
+            <a:ext cx="457200" cy="548640"/>
+          </a:xfrm>
+          <a:prstGeom prst="rect">
+            <a:avLst/>
+          </a:prstGeom>
+          <a:noFill/>
+        </p:spPr>
+        <p:txBody>
+          <a:bodyPr wrap="square">
+            <a:spAutoFit/>
+          </a:bodyPr>
+          <a:lstStyle/>
+          <a:p>
+            <a:pPr algn="l">
+              <a:defRPr sz="4800" b="1">
+                <a:solidFill>
+                  <a:srgbClr val="FF6F00"/>
+                </a:solidFill>
+              </a:defRPr>
+            </a:pPr>
+            <a:r>
+              <a:t>"</a:t>
+            </a:r>
+          </a:p>
+        </p:txBody>
+      </p:sp>
+      <p:sp>
+        <p:nvSpPr>
+          <p:cNvPr id="12" name="Rectangle 11"/>
+          <p:cNvSpPr/>
+          <p:nvPr/>
+        </p:nvSpPr>
+        <p:spPr>
+          <a:xfrm>
+            <a:off x="0" y="6217920"/>
+            <a:ext cx="9144000" cy="640080"/>
+          </a:xfrm>
+          <a:prstGeom prst="rect">
+            <a:avLst/>
+          </a:prstGeom>
+          <a:solidFill>
+            <a:srgbClr val="000000">
+              <a:alpha val="70000"/>
+            </a:srgbClr>
+          </a:solidFill>
+          <a:ln>
+            <a:noFill/>
+          </a:ln>
+        </p:spPr>
+        <p:style>
+          <a:lnRef idx="1">
+            <a:schemeClr val="accent1"/>
+          </a:lnRef>
+          <a:fillRef idx="3">
+            <a:schemeClr val="accent1"/>
+          </a:fillRef>
+          <a:effectRef idx="2">
+            <a:schemeClr val="accent1"/>
+          </a:effectRef>
+          <a:fontRef idx="minor">
+            <a:schemeClr val="lt1"/>
+          </a:fontRef>
+        </p:style>
+        <p:txBody>
+          <a:bodyPr rtlCol="0" anchor="ctr"/>
+          <a:lstStyle/>
+          <a:p>
+            <a:pPr algn="ctr"/>
+          </a:p>
+        </p:txBody>
+      </p:sp>
+      <p:sp>
+        <p:nvSpPr>
+          <p:cNvPr id="13" name="TextBox 12"/>
+          <p:cNvSpPr txBox="1"/>
+          <p:nvPr/>
+        </p:nvSpPr>
+        <p:spPr>
+          <a:xfrm>
+            <a:off x="731520" y="6309360"/>
+            <a:ext cx="7315200" cy="365760"/>
+          </a:xfrm>
+          <a:prstGeom prst="rect">
+            <a:avLst/>
+          </a:prstGeom>
+          <a:noFill/>
+        </p:spPr>
+        <p:txBody>
+          <a:bodyPr wrap="square">
+            <a:spAutoFit/>
+          </a:bodyPr>
+          <a:lstStyle/>
+          <a:p>
+            <a:pPr algn="l">
+              <a:defRPr sz="1000" b="0">
+                <a:solidFill>
+                  <a:srgbClr val="C8C8C8"/>
+                </a:solidFill>
+              </a:defRPr>
+            </a:pPr>
+            <a:r>
+              <a:t>CONFIDENTIAL  |  内部资料</a:t>
+            </a:r>
+          </a:p>
+        </p:txBody>
+      </p:sp>
+    </p:spTree>
+  </p:cSld>
+  <p:clrMapOvr>
+    <a:masterClrMapping/>
+  </p:clrMapOvr>
+</p:sld>
 </file>
 
 <file path=ppt/theme/theme1.xml><?xml version="1.0" encoding="utf-8"?>

--- a/templates/static/content/full_image_overlay_ocean_blue.pptx
+++ b/templates/static/content/full_image_overlay_ocean_blue.pptx
@@ -3356,7 +3356,7 @@
             <a:avLst/>
           </a:prstGeom>
           <a:solidFill>
-            <a:srgbClr val="FF6F00"/>
+            <a:srgbClr val="90E0EF"/>
           </a:solidFill>
           <a:ln>
             <a:noFill/>
@@ -3479,7 +3479,7 @@
             <a:pPr algn="l">
               <a:defRPr sz="4800" b="1">
                 <a:solidFill>
-                  <a:srgbClr val="FF6F00"/>
+                  <a:srgbClr val="90E0EF"/>
                 </a:solidFill>
               </a:defRPr>
             </a:pPr>
@@ -3854,7 +3854,7 @@
             <a:avLst/>
           </a:prstGeom>
           <a:solidFill>
-            <a:srgbClr val="FF6F00"/>
+            <a:srgbClr val="90E0EF"/>
           </a:solidFill>
           <a:ln>
             <a:noFill/>
@@ -3977,7 +3977,7 @@
             <a:pPr algn="l">
               <a:defRPr sz="4800" b="1">
                 <a:solidFill>
-                  <a:srgbClr val="FF6F00"/>
+                  <a:srgbClr val="90E0EF"/>
                 </a:solidFill>
               </a:defRPr>
             </a:pPr>
